--- a/pptx_sessions_8_22/第9回_応用編_講師用.pptx
+++ b/pptx_sessions_8_22/第9回_応用編_講師用.pptx
@@ -1671,7 +1671,7 @@
                 <a:ea typeface="Yu Gothic UI" pitchFamily="34" charset="-122"/>
                 <a:cs typeface="Yu Gothic UI" pitchFamily="34" charset="-120"/>
               </a:rPr>
-              <a:t>〜 公式LINE+LP/HPで集客導線を完成させる 〜</a:t>
+              <a:t>〜 リッチメニュー+LINEからLPへの連携 〜</a:t>
             </a:r>
             <a:endParaRPr lang="en-US" sz="2400" dirty="0"/>
           </a:p>
@@ -1941,7 +1941,7 @@
                 <a:ea typeface="Yu Gothic UI" pitchFamily="34" charset="-122"/>
                 <a:cs typeface="Yu Gothic UI" pitchFamily="34" charset="-120"/>
               </a:rPr>
-              <a:t>応用編は「LP/HP自動生成」と「導線整理」の2本立て。自分のレベルに合わせて選んでください。</a:t>
+              <a:t>応用編は「LINE のリッチメニュー作成」と「LP→LINE→予約の完成」の2本立てです。</a:t>
             </a:r>
             <a:endParaRPr lang="en-US" sz="2000" dirty="0"/>
           </a:p>
@@ -2050,7 +2050,7 @@
                 <a:ea typeface="Yu Gothic UI" pitchFamily="34" charset="-122"/>
                 <a:cs typeface="Yu Gothic UI" pitchFamily="34" charset="-120"/>
               </a:rPr>
-              <a:t>中級:AIでLP/HPを自動生成</a:t>
+              <a:t>中級:リッチメニューをAIで作る</a:t>
             </a:r>
             <a:endParaRPr lang="en-US" sz="2400" dirty="0"/>
           </a:p>
@@ -2089,7 +2089,7 @@
                 <a:ea typeface="Yu Gothic UI" pitchFamily="34" charset="-122"/>
                 <a:cs typeface="Yu Gothic UI" pitchFamily="34" charset="-120"/>
               </a:rPr>
-              <a:t>公式LINE登録ページまで一気通貫で</a:t>
+              <a:t>ブランディング3軸に沿った画像生成</a:t>
             </a:r>
             <a:endParaRPr lang="en-US" sz="2000" dirty="0"/>
           </a:p>
@@ -2198,7 +2198,7 @@
                 <a:ea typeface="Yu Gothic UI" pitchFamily="34" charset="-122"/>
                 <a:cs typeface="Yu Gothic UI" pitchFamily="34" charset="-120"/>
               </a:rPr>
-              <a:t>基礎:導線改善案の作成</a:t>
+              <a:t>基礎:LP/LINEの改善ポイント抽出</a:t>
             </a:r>
             <a:endParaRPr lang="en-US" sz="2400" dirty="0"/>
           </a:p>
@@ -2237,7 +2237,7 @@
                 <a:ea typeface="Yu Gothic UI" pitchFamily="34" charset="-122"/>
                 <a:cs typeface="Yu Gothic UI" pitchFamily="34" charset="-120"/>
               </a:rPr>
-              <a:t>コードなしで改善ポイントを明確化</a:t>
+              <a:t>コードなしで改善点を5つ書き出す</a:t>
             </a:r>
             <a:endParaRPr lang="en-US" sz="2000" dirty="0"/>
           </a:p>
@@ -3180,7 +3180,7 @@
                 <a:ea typeface="Yu Gothic UI" pitchFamily="34" charset="-122"/>
                 <a:cs typeface="Yu Gothic UI" pitchFamily="34" charset="-120"/>
               </a:rPr>
-              <a:t>【中級】AIでLP(ランディングページ)を自動生成</a:t>
+              <a:t>【中級】リッチメニュー+アイコンをAIで作る</a:t>
             </a:r>
             <a:endParaRPr lang="en-US" sz="2000" dirty="0"/>
           </a:p>
@@ -3320,7 +3320,7 @@
                 <a:ea typeface="Yu Gothic UI" pitchFamily="34" charset="-122"/>
                 <a:cs typeface="Yu Gothic UI" pitchFamily="34" charset="-120"/>
               </a:rPr>
-              <a:t>【中級】LPから公式LINE登録まで導線を繋ぐ</a:t>
+              <a:t>【中級】LP→公式LINE→予約 の動線を完成</a:t>
             </a:r>
             <a:endParaRPr lang="en-US" sz="2000" dirty="0"/>
           </a:p>
@@ -3460,7 +3460,7 @@
                 <a:ea typeface="Yu Gothic UI" pitchFamily="34" charset="-122"/>
                 <a:cs typeface="Yu Gothic UI" pitchFamily="34" charset="-120"/>
               </a:rPr>
-              <a:t>【基礎組】LP/HPの改善ポイントを書き出す</a:t>
+              <a:t>【基礎組】LP/LINEの改善ポイントを書き出す</a:t>
             </a:r>
             <a:endParaRPr lang="en-US" sz="2000" dirty="0"/>
           </a:p>
@@ -3856,7 +3856,7 @@
                 <a:ea typeface="Yu Gothic UI" pitchFamily="34" charset="-122"/>
                 <a:cs typeface="Yu Gothic UI" pitchFamily="34" charset="-120"/>
               </a:rPr>
-              <a:t>第9回基礎の公式LINE構成を設計できた方</a:t>
+              <a:t>第9回基礎で Lovable LP と LINE 構成を作れた方</a:t>
             </a:r>
             <a:endParaRPr lang="en-US" sz="2000" dirty="0"/>
           </a:p>
@@ -3907,7 +3907,7 @@
                 <a:ea typeface="Yu Gothic UI" pitchFamily="34" charset="-122"/>
                 <a:cs typeface="Yu Gothic UI" pitchFamily="34" charset="-120"/>
               </a:rPr>
-              <a:t>・AIツール(Gensparkなど)でLPを自動生成</a:t>
+              <a:t>・リッチメニュー+アイコンをAIで生成</a:t>
             </a:r>
             <a:endParaRPr lang="en-US" sz="2000" dirty="0"/>
           </a:p>
@@ -3924,7 +3924,7 @@
                 <a:ea typeface="Yu Gothic UI" pitchFamily="34" charset="-122"/>
                 <a:cs typeface="Yu Gothic UI" pitchFamily="34" charset="-120"/>
               </a:rPr>
-              <a:t>・LPから公式LINE登録までの導線を構築</a:t>
+              <a:t>・LP→公式LINE→アイテマス予約 の動線を完成</a:t>
             </a:r>
             <a:endParaRPr lang="en-US" sz="2000" dirty="0"/>
           </a:p>
@@ -3975,7 +3975,7 @@
                 <a:ea typeface="Yu Gothic UI" pitchFamily="34" charset="-122"/>
                 <a:cs typeface="Yu Gothic UI" pitchFamily="34" charset="-120"/>
               </a:rPr>
-              <a:t>集客の入口(LP)と出口(公式LINE)を繋いで完成させる</a:t>
+              <a:t>集客の入口(LP)と出口(予約)が一気通貫で繋がる</a:t>
             </a:r>
             <a:endParaRPr lang="en-US" sz="2000" dirty="0"/>
           </a:p>
@@ -4101,7 +4101,7 @@
                 <a:ea typeface="Yu Gothic UI" pitchFamily="34" charset="-122"/>
                 <a:cs typeface="Yu Gothic UI" pitchFamily="34" charset="-120"/>
               </a:rPr>
-              <a:t>「LP制作はちょっと敷居が高い」と感じた方</a:t>
+              <a:t>「画像生成や連携はちょっと敷居が高い」と感じた方</a:t>
             </a:r>
             <a:endParaRPr lang="en-US" sz="2000" dirty="0"/>
           </a:p>
@@ -4152,7 +4152,7 @@
                 <a:ea typeface="Yu Gothic UI" pitchFamily="34" charset="-122"/>
                 <a:cs typeface="Yu Gothic UI" pitchFamily="34" charset="-120"/>
               </a:rPr>
-              <a:t>・自分のHP/LPの現状を確認</a:t>
+              <a:t>・自分のLP/LINEの現状を見直す</a:t>
             </a:r>
             <a:endParaRPr lang="en-US" sz="2000" dirty="0"/>
           </a:p>
@@ -4451,7 +4451,7 @@
                 <a:ea typeface="Yu Gothic UI" pitchFamily="34" charset="-122"/>
                 <a:cs typeface="Yu Gothic UI" pitchFamily="34" charset="-120"/>
               </a:rPr>
-              <a:t>【中級】AIでLPを自動生成する</a:t>
+              <a:t>【中級】リッチメニュー+アイコンをAIで作る</a:t>
             </a:r>
             <a:endParaRPr lang="en-US" sz="2600" dirty="0"/>
           </a:p>
@@ -4490,7 +4490,7 @@
                 <a:ea typeface="Yu Gothic UI" pitchFamily="34" charset="-122"/>
                 <a:cs typeface="Yu Gothic UI" pitchFamily="34" charset="-120"/>
               </a:rPr>
-              <a:t>Genspark等のAIツールで、ブランディング3軸を反映したLPを自動生成します。</a:t>
+              <a:t>AIで画像を生成して、ブランディング3軸に沿ったリッチメニューを公式LINEに設置します。</a:t>
             </a:r>
             <a:endParaRPr lang="en-US" sz="2000" dirty="0"/>
           </a:p>
@@ -4638,7 +4638,7 @@
                 <a:ea typeface="Yu Gothic UI" pitchFamily="34" charset="-122"/>
                 <a:cs typeface="Yu Gothic UI" pitchFamily="34" charset="-120"/>
               </a:rPr>
-              <a:t>LPがあるとよく聞くが、Web制作の知識がなく作れていない。</a:t>
+              <a:t>リッチメニューは作ったほうがいいと聞くが、デザインの作り方が分からない。</a:t>
             </a:r>
             <a:endParaRPr lang="en-US" sz="2000" dirty="0"/>
           </a:p>
@@ -4716,7 +4716,7 @@
                 <a:ea typeface="Yu Gothic UI" pitchFamily="34" charset="-122"/>
                 <a:cs typeface="Yu Gothic UI" pitchFamily="34" charset="-120"/>
               </a:rPr>
-              <a:t>3軸を反映したLP(1枚)+ 公式LINE登録ボタン</a:t>
+              <a:t>AI生成画像を使ったリッチメニュー1枚(6分割または4分割)+ アイコン画像</a:t>
             </a:r>
             <a:endParaRPr lang="en-US" sz="2000" dirty="0"/>
           </a:p>
@@ -4794,7 +4794,7 @@
                 <a:ea typeface="Yu Gothic UI" pitchFamily="34" charset="-122"/>
                 <a:cs typeface="Yu Gothic UI" pitchFamily="34" charset="-120"/>
               </a:rPr>
-              <a:t>Genspark/Canva/v0 のいずれかを使う／3軸とAIDMAの構成を反映／文字量は読みやすさ優先</a:t>
+              <a:t>画像生成は Gemini/Genspark/Canva 等のいずれか／3軸のトーンに合わせる／文字は最小限</a:t>
             </a:r>
             <a:endParaRPr lang="en-US" sz="2000" dirty="0"/>
           </a:p>
@@ -4903,7 +4903,7 @@
                 <a:ea typeface="Yu Gothic UI" pitchFamily="34" charset="-122"/>
                 <a:cs typeface="Yu Gothic UI" pitchFamily="34" charset="-120"/>
               </a:rPr>
-              <a:t>1. Gemini に「3軸を反映したLPのワイヤーフレーム案」を作らせる</a:t>
+              <a:t>1. Gemini に「3軸を踏まえたリッチメニューのレイアウト案」を出してもらう</a:t>
             </a:r>
             <a:endParaRPr lang="en-US" sz="2000" dirty="0"/>
           </a:p>
@@ -4942,7 +4942,7 @@
                 <a:ea typeface="Yu Gothic UI" pitchFamily="34" charset="-122"/>
                 <a:cs typeface="Yu Gothic UI" pitchFamily="34" charset="-120"/>
               </a:rPr>
-              <a:t>2. Genspark等にプロンプトを入れてLPを自動生成</a:t>
+              <a:t>2. 画像生成AIで背景画像・アイコンを生成</a:t>
             </a:r>
             <a:endParaRPr lang="en-US" sz="2000" dirty="0"/>
           </a:p>
@@ -4981,7 +4981,7 @@
                 <a:ea typeface="Yu Gothic UI" pitchFamily="34" charset="-122"/>
                 <a:cs typeface="Yu Gothic UI" pitchFamily="34" charset="-120"/>
               </a:rPr>
-              <a:t>3. 生成されたLPに公式LINE登録ボタンを追加し、公開する</a:t>
+              <a:t>3. Canva 等でリッチメニュー画像を組み立てて公式LINEにアップロード</a:t>
             </a:r>
             <a:endParaRPr lang="en-US" sz="2000" dirty="0"/>
           </a:p>
@@ -5212,7 +5212,7 @@
                 <a:ea typeface="Yu Gothic UI" pitchFamily="34" charset="-122"/>
                 <a:cs typeface="Yu Gothic UI" pitchFamily="34" charset="-120"/>
               </a:rPr>
-              <a:t>【中級】LPから公式LINE登録への導線を繋ぐ</a:t>
+              <a:t>【中級】LP→LINE→予約 の動線を完成</a:t>
             </a:r>
             <a:endParaRPr lang="en-US" sz="2600" dirty="0"/>
           </a:p>
@@ -5251,7 +5251,7 @@
                 <a:ea typeface="Yu Gothic UI" pitchFamily="34" charset="-122"/>
                 <a:cs typeface="Yu Gothic UI" pitchFamily="34" charset="-120"/>
               </a:rPr>
-              <a:t>LP→公式LINE→面談予約までの動線を1本に繋ぎます。</a:t>
+              <a:t>基礎編の Lovable LP と公式LINE、第8回のアイテマス予約を一本の動線に繋ぎます。</a:t>
             </a:r>
             <a:endParaRPr lang="en-US" sz="2000" dirty="0"/>
           </a:p>
@@ -5399,7 +5399,7 @@
                 <a:ea typeface="Yu Gothic UI" pitchFamily="34" charset="-122"/>
                 <a:cs typeface="Yu Gothic UI" pitchFamily="34" charset="-120"/>
               </a:rPr>
-              <a:t>LPと公式LINEはあるが、間が繋がっておらず登録率が低い。</a:t>
+              <a:t>LP・LINE・予約は揃ったが、間の繋ぎが弱く登録率/予約率が低い。</a:t>
             </a:r>
             <a:endParaRPr lang="en-US" sz="2000" dirty="0"/>
           </a:p>
@@ -5664,7 +5664,7 @@
                 <a:ea typeface="Yu Gothic UI" pitchFamily="34" charset="-122"/>
                 <a:cs typeface="Yu Gothic UI" pitchFamily="34" charset="-120"/>
               </a:rPr>
-              <a:t>1. LPにLINE登録ボタンを配置(QR+リンク両方)</a:t>
+              <a:t>1. Lovable LP にLINE登録ボタンを配置(QR+リンク両方)</a:t>
             </a:r>
             <a:endParaRPr lang="en-US" sz="2000" dirty="0"/>
           </a:p>
@@ -5742,7 +5742,7 @@
                 <a:ea typeface="Yu Gothic UI" pitchFamily="34" charset="-122"/>
                 <a:cs typeface="Yu Gothic UI" pitchFamily="34" charset="-120"/>
               </a:rPr>
-              <a:t>3. 自動応答からアイテマス予約URLへ誘導する流れをテスト</a:t>
+              <a:t>3. 自動応答からアイテマス予約URLへ誘導し、エンドツーエンドでテスト</a:t>
             </a:r>
             <a:endParaRPr lang="en-US" sz="2000" dirty="0"/>
           </a:p>
@@ -5973,7 +5973,7 @@
                 <a:ea typeface="Yu Gothic UI" pitchFamily="34" charset="-122"/>
                 <a:cs typeface="Yu Gothic UI" pitchFamily="34" charset="-120"/>
               </a:rPr>
-              <a:t>【基礎組】LP/HPの改善ポイントを書き出す</a:t>
+              <a:t>【基礎組】LP/LINEの改善ポイントを書き出す</a:t>
             </a:r>
             <a:endParaRPr lang="en-US" sz="2600" dirty="0"/>
           </a:p>
@@ -6160,7 +6160,7 @@
                 <a:ea typeface="Yu Gothic UI" pitchFamily="34" charset="-122"/>
                 <a:cs typeface="Yu Gothic UI" pitchFamily="34" charset="-120"/>
               </a:rPr>
-              <a:t>LPもHPもあるが、3軸に沿った構成になっているか自信がない。</a:t>
+              <a:t>LP/LINE はあるが、3軸に沿った構成になっているか自信がない。</a:t>
             </a:r>
             <a:endParaRPr lang="en-US" sz="2000" dirty="0"/>
           </a:p>
@@ -6316,7 +6316,7 @@
                 <a:ea typeface="Yu Gothic UI" pitchFamily="34" charset="-122"/>
                 <a:cs typeface="Yu Gothic UI" pitchFamily="34" charset="-120"/>
               </a:rPr>
-              <a:t>GAS不要／Gemini チャットで添削してもらう／優先度は高/中/低の3段階</a:t>
+              <a:t>GAS不要／Geminiチャットで添削してもらう／優先度は高/中/低の3段階</a:t>
             </a:r>
             <a:endParaRPr lang="en-US" sz="2000" dirty="0"/>
           </a:p>
@@ -6425,7 +6425,7 @@
                 <a:ea typeface="Yu Gothic UI" pitchFamily="34" charset="-122"/>
                 <a:cs typeface="Yu Gothic UI" pitchFamily="34" charset="-120"/>
               </a:rPr>
-              <a:t>1. 自分のLP/HPのURLか文章を Gemini に貼り付ける</a:t>
+              <a:t>1. 自分のLP/HP/LINEのスクショまたは文章を Gemini に貼り付ける</a:t>
             </a:r>
             <a:endParaRPr lang="en-US" sz="2000" dirty="0"/>
           </a:p>
@@ -6703,7 +6703,7 @@
                 <a:ea typeface="Yu Gothic UI" pitchFamily="34" charset="-122"/>
                 <a:cs typeface="Yu Gothic UI" pitchFamily="34" charset="-120"/>
               </a:rPr>
-              <a:t>公式LINE導線編まで完走。「ブランディング3軸 → LP → LINE → 予約」の流れが繋がりました。</a:t>
+              <a:t>LP+公式LINE編まで完走。「ブランディング3軸 → LP → LINE → 予約」の流れが繋がりました。</a:t>
             </a:r>
             <a:endParaRPr lang="en-US" sz="2000" dirty="0"/>
           </a:p>
@@ -6880,7 +6880,7 @@
                 <a:ea typeface="Yu Gothic UI" pitchFamily="34" charset="-122"/>
                 <a:cs typeface="Yu Gothic UI" pitchFamily="34" charset="-120"/>
               </a:rPr>
-              <a:t>LINEの設計をAIDMAで作れた</a:t>
+              <a:t>Lovable で LP が作れた</a:t>
             </a:r>
             <a:endParaRPr lang="en-US" sz="2200" dirty="0"/>
           </a:p>
@@ -6919,7 +6919,7 @@
                 <a:ea typeface="Yu Gothic UI" pitchFamily="34" charset="-122"/>
                 <a:cs typeface="Yu Gothic UI" pitchFamily="34" charset="-120"/>
               </a:rPr>
-              <a:t>導線がブレない LINE 運用ができる</a:t>
+              <a:t>バイブコーディングでWebが作れる</a:t>
             </a:r>
             <a:endParaRPr lang="en-US" sz="2000" dirty="0"/>
           </a:p>
@@ -7057,7 +7057,7 @@
                 <a:ea typeface="Yu Gothic UI" pitchFamily="34" charset="-122"/>
                 <a:cs typeface="Yu Gothic UI" pitchFamily="34" charset="-120"/>
               </a:rPr>
-              <a:t>画像もLPもAIで生成できる</a:t>
+              <a:t>LINE の設計を AIDMA で</a:t>
             </a:r>
             <a:endParaRPr lang="en-US" sz="2200" dirty="0"/>
           </a:p>
@@ -7096,7 +7096,7 @@
                 <a:ea typeface="Yu Gothic UI" pitchFamily="34" charset="-122"/>
                 <a:cs typeface="Yu Gothic UI" pitchFamily="34" charset="-120"/>
               </a:rPr>
-              <a:t>デザインの知識がなくても形にできる</a:t>
+              <a:t>導線がブレない LINE 運用ができる</a:t>
             </a:r>
             <a:endParaRPr lang="en-US" sz="2000" dirty="0"/>
           </a:p>

--- a/pptx_sessions_8_22/第9回_応用編_講師用.pptx
+++ b/pptx_sessions_8_22/第9回_応用編_講師用.pptx
@@ -1527,7 +1527,9 @@
           </a:ln>
         </p:spPr>
         <p:txBody>
-          <a:bodyPr/>
+          <a:bodyPr wrap="square">
+            <a:normAutofit/>
+          </a:bodyPr>
           <a:p/>
         </p:txBody>
       </p:sp>
@@ -1556,7 +1558,9 @@
           </a:ln>
         </p:spPr>
         <p:txBody>
-          <a:bodyPr/>
+          <a:bodyPr wrap="square">
+            <a:normAutofit/>
+          </a:bodyPr>
           <a:p/>
         </p:txBody>
       </p:sp>
@@ -1578,7 +1582,9 @@
           <a:ln/>
         </p:spPr>
         <p:txBody>
-          <a:bodyPr wrap="square" rtlCol="0" anchor="ctr"/>
+          <a:bodyPr wrap="square" rtlCol="0" anchor="ctr">
+            <a:normAutofit/>
+          </a:bodyPr>
           <a:lstStyle/>
           <a:p>
             <a:pPr algn="ctr" indent="0" marL="0">
@@ -1617,7 +1623,9 @@
           <a:ln/>
         </p:spPr>
         <p:txBody>
-          <a:bodyPr wrap="square" rtlCol="0" anchor="ctr"/>
+          <a:bodyPr wrap="square" rtlCol="0" anchor="ctr">
+            <a:normAutofit/>
+          </a:bodyPr>
           <a:lstStyle/>
           <a:p>
             <a:pPr algn="ctr" indent="0" marL="0">
@@ -1656,7 +1664,9 @@
           <a:ln/>
         </p:spPr>
         <p:txBody>
-          <a:bodyPr wrap="square" rtlCol="0" anchor="ctr"/>
+          <a:bodyPr wrap="square" rtlCol="0" anchor="ctr">
+            <a:normAutofit/>
+          </a:bodyPr>
           <a:lstStyle/>
           <a:p>
             <a:pPr algn="ctr" indent="0" marL="0">
@@ -1695,7 +1705,9 @@
           <a:ln/>
         </p:spPr>
         <p:txBody>
-          <a:bodyPr wrap="square" rtlCol="0" anchor="ctr"/>
+          <a:bodyPr wrap="square" rtlCol="0" anchor="ctr">
+            <a:normAutofit/>
+          </a:bodyPr>
           <a:lstStyle/>
           <a:p>
             <a:pPr algn="ctr" indent="0" marL="0">
@@ -1743,7 +1755,9 @@
           </a:ln>
         </p:spPr>
         <p:txBody>
-          <a:bodyPr/>
+          <a:bodyPr wrap="square">
+            <a:normAutofit/>
+          </a:bodyPr>
           <a:p/>
         </p:txBody>
       </p:sp>
@@ -1765,7 +1779,9 @@
           <a:ln/>
         </p:spPr>
         <p:txBody>
-          <a:bodyPr wrap="square" rtlCol="0" anchor="ctr"/>
+          <a:bodyPr wrap="square" rtlCol="0" anchor="ctr">
+            <a:normAutofit/>
+          </a:bodyPr>
           <a:lstStyle/>
           <a:p>
             <a:pPr algn="ctr" indent="0" marL="0">
@@ -1836,7 +1852,9 @@
           </a:ln>
         </p:spPr>
         <p:txBody>
-          <a:bodyPr/>
+          <a:bodyPr wrap="square">
+            <a:normAutofit/>
+          </a:bodyPr>
           <a:p/>
         </p:txBody>
       </p:sp>
@@ -1865,7 +1883,9 @@
           </a:ln>
         </p:spPr>
         <p:txBody>
-          <a:bodyPr/>
+          <a:bodyPr wrap="square">
+            <a:normAutofit/>
+          </a:bodyPr>
           <a:p/>
         </p:txBody>
       </p:sp>
@@ -1887,7 +1907,9 @@
           <a:ln/>
         </p:spPr>
         <p:txBody>
-          <a:bodyPr wrap="square" rtlCol="0" anchor="ctr"/>
+          <a:bodyPr wrap="square" rtlCol="0" anchor="ctr">
+            <a:normAutofit/>
+          </a:bodyPr>
           <a:lstStyle/>
           <a:p>
             <a:pPr indent="0" marL="0">
@@ -1926,7 +1948,9 @@
           <a:ln/>
         </p:spPr>
         <p:txBody>
-          <a:bodyPr wrap="square" rtlCol="0" anchor="ctr"/>
+          <a:bodyPr wrap="square" rtlCol="0" anchor="ctr">
+            <a:normAutofit/>
+          </a:bodyPr>
           <a:lstStyle/>
           <a:p>
             <a:pPr indent="0" marL="0">
@@ -1974,7 +1998,9 @@
           </a:ln>
         </p:spPr>
         <p:txBody>
-          <a:bodyPr/>
+          <a:bodyPr wrap="square">
+            <a:normAutofit/>
+          </a:bodyPr>
           <a:p/>
         </p:txBody>
       </p:sp>
@@ -1996,7 +2022,9 @@
           <a:ln/>
         </p:spPr>
         <p:txBody>
-          <a:bodyPr wrap="square" rtlCol="0" anchor="ctr"/>
+          <a:bodyPr wrap="square" rtlCol="0" anchor="ctr">
+            <a:normAutofit/>
+          </a:bodyPr>
           <a:lstStyle/>
           <a:p>
             <a:pPr indent="0" marL="0">
@@ -2035,7 +2063,9 @@
           <a:ln/>
         </p:spPr>
         <p:txBody>
-          <a:bodyPr wrap="square" rtlCol="0" anchor="ctr"/>
+          <a:bodyPr wrap="square" rtlCol="0" anchor="ctr">
+            <a:normAutofit/>
+          </a:bodyPr>
           <a:lstStyle/>
           <a:p>
             <a:pPr indent="0" marL="0">
@@ -2074,7 +2104,9 @@
           <a:ln/>
         </p:spPr>
         <p:txBody>
-          <a:bodyPr wrap="square" rtlCol="0" anchor="ctr"/>
+          <a:bodyPr wrap="square" rtlCol="0" anchor="ctr">
+            <a:normAutofit/>
+          </a:bodyPr>
           <a:lstStyle/>
           <a:p>
             <a:pPr indent="0" marL="0">
@@ -2122,7 +2154,9 @@
           </a:ln>
         </p:spPr>
         <p:txBody>
-          <a:bodyPr/>
+          <a:bodyPr wrap="square">
+            <a:normAutofit/>
+          </a:bodyPr>
           <a:p/>
         </p:txBody>
       </p:sp>
@@ -2144,7 +2178,9 @@
           <a:ln/>
         </p:spPr>
         <p:txBody>
-          <a:bodyPr wrap="square" rtlCol="0" anchor="ctr"/>
+          <a:bodyPr wrap="square" rtlCol="0" anchor="ctr">
+            <a:normAutofit/>
+          </a:bodyPr>
           <a:lstStyle/>
           <a:p>
             <a:pPr indent="0" marL="0">
@@ -2183,7 +2219,9 @@
           <a:ln/>
         </p:spPr>
         <p:txBody>
-          <a:bodyPr wrap="square" rtlCol="0" anchor="ctr"/>
+          <a:bodyPr wrap="square" rtlCol="0" anchor="ctr">
+            <a:normAutofit/>
+          </a:bodyPr>
           <a:lstStyle/>
           <a:p>
             <a:pPr indent="0" marL="0">
@@ -2222,7 +2260,9 @@
           <a:ln/>
         </p:spPr>
         <p:txBody>
-          <a:bodyPr wrap="square" rtlCol="0" anchor="ctr"/>
+          <a:bodyPr wrap="square" rtlCol="0" anchor="ctr">
+            <a:normAutofit/>
+          </a:bodyPr>
           <a:lstStyle/>
           <a:p>
             <a:pPr indent="0" marL="0">
@@ -2270,7 +2310,9 @@
           </a:ln>
         </p:spPr>
         <p:txBody>
-          <a:bodyPr/>
+          <a:bodyPr wrap="square">
+            <a:normAutofit/>
+          </a:bodyPr>
           <a:p/>
         </p:txBody>
       </p:sp>
@@ -2292,7 +2334,9 @@
           <a:ln/>
         </p:spPr>
         <p:txBody>
-          <a:bodyPr wrap="square" rtlCol="0" anchor="ctr"/>
+          <a:bodyPr wrap="square" rtlCol="0" anchor="ctr">
+            <a:normAutofit/>
+          </a:bodyPr>
           <a:lstStyle/>
           <a:p>
             <a:pPr indent="0" marL="0">
@@ -2331,7 +2375,9 @@
           <a:ln/>
         </p:spPr>
         <p:txBody>
-          <a:bodyPr wrap="square" rtlCol="0" anchor="ctr"/>
+          <a:bodyPr wrap="square" rtlCol="0" anchor="ctr">
+            <a:normAutofit/>
+          </a:bodyPr>
           <a:lstStyle/>
           <a:p>
             <a:pPr indent="0" marL="0">
@@ -2370,7 +2416,9 @@
           <a:ln/>
         </p:spPr>
         <p:txBody>
-          <a:bodyPr wrap="square" rtlCol="0" anchor="ctr"/>
+          <a:bodyPr wrap="square" rtlCol="0" anchor="ctr">
+            <a:normAutofit/>
+          </a:bodyPr>
           <a:lstStyle/>
           <a:p>
             <a:pPr indent="0" marL="0">
@@ -2409,7 +2457,9 @@
           <a:ln/>
         </p:spPr>
         <p:txBody>
-          <a:bodyPr wrap="square" rtlCol="0" anchor="ctr"/>
+          <a:bodyPr wrap="square" rtlCol="0" anchor="ctr">
+            <a:normAutofit/>
+          </a:bodyPr>
           <a:lstStyle/>
           <a:p>
             <a:pPr algn="r" indent="0" marL="0">
@@ -2480,7 +2530,9 @@
           </a:ln>
         </p:spPr>
         <p:txBody>
-          <a:bodyPr/>
+          <a:bodyPr wrap="square">
+            <a:normAutofit/>
+          </a:bodyPr>
           <a:p/>
         </p:txBody>
       </p:sp>
@@ -2509,7 +2561,9 @@
           </a:ln>
         </p:spPr>
         <p:txBody>
-          <a:bodyPr/>
+          <a:bodyPr wrap="square">
+            <a:normAutofit/>
+          </a:bodyPr>
           <a:p/>
         </p:txBody>
       </p:sp>
@@ -2531,7 +2585,9 @@
           <a:ln/>
         </p:spPr>
         <p:txBody>
-          <a:bodyPr wrap="square" rtlCol="0" anchor="ctr"/>
+          <a:bodyPr wrap="square" rtlCol="0" anchor="ctr">
+            <a:normAutofit/>
+          </a:bodyPr>
           <a:lstStyle/>
           <a:p>
             <a:pPr indent="0" marL="0">
@@ -2570,7 +2626,9 @@
           <a:ln/>
         </p:spPr>
         <p:txBody>
-          <a:bodyPr wrap="square" rtlCol="0" anchor="ctr"/>
+          <a:bodyPr wrap="square" rtlCol="0" anchor="ctr">
+            <a:normAutofit/>
+          </a:bodyPr>
           <a:lstStyle/>
           <a:p>
             <a:pPr indent="0" marL="0">
@@ -2616,7 +2674,9 @@
           </a:ln>
         </p:spPr>
         <p:txBody>
-          <a:bodyPr/>
+          <a:bodyPr wrap="square">
+            <a:normAutofit/>
+          </a:bodyPr>
           <a:p/>
         </p:txBody>
       </p:sp>
@@ -2647,7 +2707,9 @@
           </a:ln>
         </p:spPr>
         <p:txBody>
-          <a:bodyPr/>
+          <a:bodyPr wrap="square">
+            <a:normAutofit/>
+          </a:bodyPr>
           <a:p/>
         </p:txBody>
       </p:sp>
@@ -2669,7 +2731,9 @@
           <a:ln/>
         </p:spPr>
         <p:txBody>
-          <a:bodyPr wrap="square" rtlCol="0" anchor="ctr"/>
+          <a:bodyPr wrap="square" rtlCol="0" anchor="ctr">
+            <a:normAutofit/>
+          </a:bodyPr>
           <a:lstStyle/>
           <a:p>
             <a:pPr algn="ctr" indent="0" marL="0">
@@ -2708,7 +2772,9 @@
           <a:ln/>
         </p:spPr>
         <p:txBody>
-          <a:bodyPr wrap="square" rtlCol="0" anchor="ctr"/>
+          <a:bodyPr wrap="square" rtlCol="0" anchor="ctr">
+            <a:normAutofit/>
+          </a:bodyPr>
           <a:lstStyle/>
           <a:p>
             <a:pPr indent="0" marL="0">
@@ -2754,7 +2820,9 @@
           </a:ln>
         </p:spPr>
         <p:txBody>
-          <a:bodyPr/>
+          <a:bodyPr wrap="square">
+            <a:normAutofit/>
+          </a:bodyPr>
           <a:p/>
         </p:txBody>
       </p:sp>
@@ -2785,7 +2853,9 @@
           </a:ln>
         </p:spPr>
         <p:txBody>
-          <a:bodyPr/>
+          <a:bodyPr wrap="square">
+            <a:normAutofit/>
+          </a:bodyPr>
           <a:p/>
         </p:txBody>
       </p:sp>
@@ -2807,7 +2877,9 @@
           <a:ln/>
         </p:spPr>
         <p:txBody>
-          <a:bodyPr wrap="square" rtlCol="0" anchor="ctr"/>
+          <a:bodyPr wrap="square" rtlCol="0" anchor="ctr">
+            <a:normAutofit/>
+          </a:bodyPr>
           <a:lstStyle/>
           <a:p>
             <a:pPr algn="ctr" indent="0" marL="0">
@@ -2846,7 +2918,9 @@
           <a:ln/>
         </p:spPr>
         <p:txBody>
-          <a:bodyPr wrap="square" rtlCol="0" anchor="ctr"/>
+          <a:bodyPr wrap="square" rtlCol="0" anchor="ctr">
+            <a:normAutofit/>
+          </a:bodyPr>
           <a:lstStyle/>
           <a:p>
             <a:pPr indent="0" marL="0">
@@ -2885,7 +2959,9 @@
           <a:ln/>
         </p:spPr>
         <p:txBody>
-          <a:bodyPr wrap="square" rtlCol="0" anchor="ctr"/>
+          <a:bodyPr wrap="square" rtlCol="0" anchor="ctr">
+            <a:normAutofit/>
+          </a:bodyPr>
           <a:lstStyle/>
           <a:p>
             <a:pPr indent="0" marL="0">
@@ -2933,7 +3009,9 @@
           </a:ln>
         </p:spPr>
         <p:txBody>
-          <a:bodyPr/>
+          <a:bodyPr wrap="square">
+            <a:normAutofit/>
+          </a:bodyPr>
           <a:p/>
         </p:txBody>
       </p:sp>
@@ -2964,7 +3042,9 @@
           </a:ln>
         </p:spPr>
         <p:txBody>
-          <a:bodyPr/>
+          <a:bodyPr wrap="square">
+            <a:normAutofit/>
+          </a:bodyPr>
           <a:p/>
         </p:txBody>
       </p:sp>
@@ -2986,7 +3066,9 @@
           <a:ln/>
         </p:spPr>
         <p:txBody>
-          <a:bodyPr wrap="square" rtlCol="0" anchor="ctr"/>
+          <a:bodyPr wrap="square" rtlCol="0" anchor="ctr">
+            <a:normAutofit/>
+          </a:bodyPr>
           <a:lstStyle/>
           <a:p>
             <a:pPr algn="ctr" indent="0" marL="0">
@@ -3025,7 +3107,9 @@
           <a:ln/>
         </p:spPr>
         <p:txBody>
-          <a:bodyPr wrap="square" rtlCol="0" anchor="ctr"/>
+          <a:bodyPr wrap="square" rtlCol="0" anchor="ctr">
+            <a:normAutofit/>
+          </a:bodyPr>
           <a:lstStyle/>
           <a:p>
             <a:pPr indent="0" marL="0">
@@ -3073,7 +3157,9 @@
           </a:ln>
         </p:spPr>
         <p:txBody>
-          <a:bodyPr/>
+          <a:bodyPr wrap="square">
+            <a:normAutofit/>
+          </a:bodyPr>
           <a:p/>
         </p:txBody>
       </p:sp>
@@ -3104,7 +3190,9 @@
           </a:ln>
         </p:spPr>
         <p:txBody>
-          <a:bodyPr/>
+          <a:bodyPr wrap="square">
+            <a:normAutofit/>
+          </a:bodyPr>
           <a:p/>
         </p:txBody>
       </p:sp>
@@ -3126,7 +3214,9 @@
           <a:ln/>
         </p:spPr>
         <p:txBody>
-          <a:bodyPr wrap="square" rtlCol="0" anchor="ctr"/>
+          <a:bodyPr wrap="square" rtlCol="0" anchor="ctr">
+            <a:normAutofit/>
+          </a:bodyPr>
           <a:lstStyle/>
           <a:p>
             <a:pPr algn="ctr" indent="0" marL="0">
@@ -3165,7 +3255,9 @@
           <a:ln/>
         </p:spPr>
         <p:txBody>
-          <a:bodyPr wrap="square" rtlCol="0" anchor="ctr"/>
+          <a:bodyPr wrap="square" rtlCol="0" anchor="ctr">
+            <a:normAutofit/>
+          </a:bodyPr>
           <a:lstStyle/>
           <a:p>
             <a:pPr indent="0" marL="0">
@@ -3213,7 +3305,9 @@
           </a:ln>
         </p:spPr>
         <p:txBody>
-          <a:bodyPr/>
+          <a:bodyPr wrap="square">
+            <a:normAutofit/>
+          </a:bodyPr>
           <a:p/>
         </p:txBody>
       </p:sp>
@@ -3244,7 +3338,9 @@
           </a:ln>
         </p:spPr>
         <p:txBody>
-          <a:bodyPr/>
+          <a:bodyPr wrap="square">
+            <a:normAutofit/>
+          </a:bodyPr>
           <a:p/>
         </p:txBody>
       </p:sp>
@@ -3266,7 +3362,9 @@
           <a:ln/>
         </p:spPr>
         <p:txBody>
-          <a:bodyPr wrap="square" rtlCol="0" anchor="ctr"/>
+          <a:bodyPr wrap="square" rtlCol="0" anchor="ctr">
+            <a:normAutofit/>
+          </a:bodyPr>
           <a:lstStyle/>
           <a:p>
             <a:pPr algn="ctr" indent="0" marL="0">
@@ -3305,7 +3403,9 @@
           <a:ln/>
         </p:spPr>
         <p:txBody>
-          <a:bodyPr wrap="square" rtlCol="0" anchor="ctr"/>
+          <a:bodyPr wrap="square" rtlCol="0" anchor="ctr">
+            <a:normAutofit/>
+          </a:bodyPr>
           <a:lstStyle/>
           <a:p>
             <a:pPr indent="0" marL="0">
@@ -3353,7 +3453,9 @@
           </a:ln>
         </p:spPr>
         <p:txBody>
-          <a:bodyPr/>
+          <a:bodyPr wrap="square">
+            <a:normAutofit/>
+          </a:bodyPr>
           <a:p/>
         </p:txBody>
       </p:sp>
@@ -3384,7 +3486,9 @@
           </a:ln>
         </p:spPr>
         <p:txBody>
-          <a:bodyPr/>
+          <a:bodyPr wrap="square">
+            <a:normAutofit/>
+          </a:bodyPr>
           <a:p/>
         </p:txBody>
       </p:sp>
@@ -3406,7 +3510,9 @@
           <a:ln/>
         </p:spPr>
         <p:txBody>
-          <a:bodyPr wrap="square" rtlCol="0" anchor="ctr"/>
+          <a:bodyPr wrap="square" rtlCol="0" anchor="ctr">
+            <a:normAutofit/>
+          </a:bodyPr>
           <a:lstStyle/>
           <a:p>
             <a:pPr algn="ctr" indent="0" marL="0">
@@ -3445,7 +3551,9 @@
           <a:ln/>
         </p:spPr>
         <p:txBody>
-          <a:bodyPr wrap="square" rtlCol="0" anchor="ctr"/>
+          <a:bodyPr wrap="square" rtlCol="0" anchor="ctr">
+            <a:normAutofit/>
+          </a:bodyPr>
           <a:lstStyle/>
           <a:p>
             <a:pPr indent="0" marL="0">
@@ -3484,7 +3592,9 @@
           <a:ln/>
         </p:spPr>
         <p:txBody>
-          <a:bodyPr wrap="square" rtlCol="0" anchor="ctr"/>
+          <a:bodyPr wrap="square" rtlCol="0" anchor="ctr">
+            <a:normAutofit/>
+          </a:bodyPr>
           <a:lstStyle/>
           <a:p>
             <a:pPr algn="r" indent="0" marL="0">
@@ -3555,7 +3665,9 @@
           </a:ln>
         </p:spPr>
         <p:txBody>
-          <a:bodyPr/>
+          <a:bodyPr wrap="square">
+            <a:normAutofit/>
+          </a:bodyPr>
           <a:p/>
         </p:txBody>
       </p:sp>
@@ -3584,7 +3696,9 @@
           </a:ln>
         </p:spPr>
         <p:txBody>
-          <a:bodyPr/>
+          <a:bodyPr wrap="square">
+            <a:normAutofit/>
+          </a:bodyPr>
           <a:p/>
         </p:txBody>
       </p:sp>
@@ -3615,7 +3729,9 @@
           </a:ln>
         </p:spPr>
         <p:txBody>
-          <a:bodyPr/>
+          <a:bodyPr wrap="square">
+            <a:normAutofit/>
+          </a:bodyPr>
           <a:p/>
         </p:txBody>
       </p:sp>
@@ -3637,7 +3753,9 @@
           <a:ln/>
         </p:spPr>
         <p:txBody>
-          <a:bodyPr wrap="square" rtlCol="0" anchor="ctr"/>
+          <a:bodyPr wrap="square" rtlCol="0" anchor="ctr">
+            <a:normAutofit/>
+          </a:bodyPr>
           <a:lstStyle/>
           <a:p>
             <a:pPr algn="ctr" indent="0" marL="0">
@@ -3676,7 +3794,9 @@
           <a:ln/>
         </p:spPr>
         <p:txBody>
-          <a:bodyPr wrap="square" rtlCol="0" anchor="ctr"/>
+          <a:bodyPr wrap="square" rtlCol="0" anchor="ctr">
+            <a:normAutofit/>
+          </a:bodyPr>
           <a:lstStyle/>
           <a:p>
             <a:pPr indent="0" marL="0">
@@ -3715,7 +3835,9 @@
           <a:ln/>
         </p:spPr>
         <p:txBody>
-          <a:bodyPr wrap="square" rtlCol="0" anchor="ctr"/>
+          <a:bodyPr wrap="square" rtlCol="0" anchor="ctr">
+            <a:normAutofit/>
+          </a:bodyPr>
           <a:lstStyle/>
           <a:p>
             <a:pPr indent="0" marL="0">
@@ -3763,7 +3885,9 @@
           </a:ln>
         </p:spPr>
         <p:txBody>
-          <a:bodyPr/>
+          <a:bodyPr wrap="square">
+            <a:normAutofit/>
+          </a:bodyPr>
           <a:p/>
         </p:txBody>
       </p:sp>
@@ -3785,7 +3909,9 @@
           <a:ln/>
         </p:spPr>
         <p:txBody>
-          <a:bodyPr wrap="square" rtlCol="0" anchor="ctr"/>
+          <a:bodyPr wrap="square" rtlCol="0" anchor="ctr">
+            <a:normAutofit/>
+          </a:bodyPr>
           <a:lstStyle/>
           <a:p>
             <a:pPr indent="0" marL="0">
@@ -3824,7 +3950,9 @@
           <a:ln/>
         </p:spPr>
         <p:txBody>
-          <a:bodyPr wrap="square" rtlCol="0" anchor="t"/>
+          <a:bodyPr wrap="square" rtlCol="0" anchor="t">
+            <a:normAutofit/>
+          </a:bodyPr>
           <a:lstStyle/>
           <a:p>
             <a:pPr indent="0" marL="0">
@@ -4008,7 +4136,9 @@
           </a:ln>
         </p:spPr>
         <p:txBody>
-          <a:bodyPr/>
+          <a:bodyPr wrap="square">
+            <a:normAutofit/>
+          </a:bodyPr>
           <a:p/>
         </p:txBody>
       </p:sp>
@@ -4030,7 +4160,9 @@
           <a:ln/>
         </p:spPr>
         <p:txBody>
-          <a:bodyPr wrap="square" rtlCol="0" anchor="ctr"/>
+          <a:bodyPr wrap="square" rtlCol="0" anchor="ctr">
+            <a:normAutofit/>
+          </a:bodyPr>
           <a:lstStyle/>
           <a:p>
             <a:pPr indent="0" marL="0">
@@ -4069,7 +4201,9 @@
           <a:ln/>
         </p:spPr>
         <p:txBody>
-          <a:bodyPr wrap="square" rtlCol="0" anchor="t"/>
+          <a:bodyPr wrap="square" rtlCol="0" anchor="t">
+            <a:normAutofit/>
+          </a:bodyPr>
           <a:lstStyle/>
           <a:p>
             <a:pPr indent="0" marL="0">
@@ -4244,7 +4378,9 @@
           <a:ln/>
         </p:spPr>
         <p:txBody>
-          <a:bodyPr wrap="square" rtlCol="0" anchor="ctr"/>
+          <a:bodyPr wrap="square" rtlCol="0" anchor="ctr">
+            <a:normAutofit/>
+          </a:bodyPr>
           <a:lstStyle/>
           <a:p>
             <a:pPr algn="r" indent="0" marL="0">
@@ -4315,7 +4451,9 @@
           </a:ln>
         </p:spPr>
         <p:txBody>
-          <a:bodyPr/>
+          <a:bodyPr wrap="square">
+            <a:normAutofit/>
+          </a:bodyPr>
           <a:p/>
         </p:txBody>
       </p:sp>
@@ -4344,7 +4482,9 @@
           </a:ln>
         </p:spPr>
         <p:txBody>
-          <a:bodyPr/>
+          <a:bodyPr wrap="square">
+            <a:normAutofit/>
+          </a:bodyPr>
           <a:p/>
         </p:txBody>
       </p:sp>
@@ -4375,7 +4515,9 @@
           </a:ln>
         </p:spPr>
         <p:txBody>
-          <a:bodyPr/>
+          <a:bodyPr wrap="square">
+            <a:normAutofit/>
+          </a:bodyPr>
           <a:p/>
         </p:txBody>
       </p:sp>
@@ -4397,7 +4539,9 @@
           <a:ln/>
         </p:spPr>
         <p:txBody>
-          <a:bodyPr wrap="square" rtlCol="0" anchor="ctr"/>
+          <a:bodyPr wrap="square" rtlCol="0" anchor="ctr">
+            <a:normAutofit/>
+          </a:bodyPr>
           <a:lstStyle/>
           <a:p>
             <a:pPr algn="ctr" indent="0" marL="0">
@@ -4436,7 +4580,9 @@
           <a:ln/>
         </p:spPr>
         <p:txBody>
-          <a:bodyPr wrap="square" rtlCol="0" anchor="ctr"/>
+          <a:bodyPr wrap="square" rtlCol="0" anchor="ctr">
+            <a:normAutofit/>
+          </a:bodyPr>
           <a:lstStyle/>
           <a:p>
             <a:pPr indent="0" marL="0">
@@ -4475,7 +4621,9 @@
           <a:ln/>
         </p:spPr>
         <p:txBody>
-          <a:bodyPr wrap="square" rtlCol="0" anchor="ctr"/>
+          <a:bodyPr wrap="square" rtlCol="0" anchor="ctr">
+            <a:normAutofit/>
+          </a:bodyPr>
           <a:lstStyle/>
           <a:p>
             <a:pPr indent="0" marL="0">
@@ -4523,7 +4671,9 @@
           </a:ln>
         </p:spPr>
         <p:txBody>
-          <a:bodyPr/>
+          <a:bodyPr wrap="square">
+            <a:normAutofit/>
+          </a:bodyPr>
           <a:p/>
         </p:txBody>
       </p:sp>
@@ -4545,7 +4695,9 @@
           <a:ln/>
         </p:spPr>
         <p:txBody>
-          <a:bodyPr wrap="square" rtlCol="0" anchor="ctr"/>
+          <a:bodyPr wrap="square" rtlCol="0" anchor="ctr">
+            <a:normAutofit/>
+          </a:bodyPr>
           <a:lstStyle/>
           <a:p>
             <a:pPr indent="0" marL="0">
@@ -4584,7 +4736,9 @@
           <a:ln/>
         </p:spPr>
         <p:txBody>
-          <a:bodyPr wrap="square" rtlCol="0" anchor="ctr"/>
+          <a:bodyPr wrap="square" rtlCol="0" anchor="ctr">
+            <a:normAutofit/>
+          </a:bodyPr>
           <a:lstStyle/>
           <a:p>
             <a:pPr indent="0" marL="0">
@@ -4623,7 +4777,9 @@
           <a:ln/>
         </p:spPr>
         <p:txBody>
-          <a:bodyPr wrap="square" rtlCol="0" anchor="t"/>
+          <a:bodyPr wrap="square" rtlCol="0" anchor="t">
+            <a:normAutofit/>
+          </a:bodyPr>
           <a:lstStyle/>
           <a:p>
             <a:pPr indent="0" marL="0">
@@ -4662,7 +4818,9 @@
           <a:ln/>
         </p:spPr>
         <p:txBody>
-          <a:bodyPr wrap="square" rtlCol="0" anchor="ctr"/>
+          <a:bodyPr wrap="square" rtlCol="0" anchor="ctr">
+            <a:normAutofit/>
+          </a:bodyPr>
           <a:lstStyle/>
           <a:p>
             <a:pPr indent="0" marL="0">
@@ -4701,7 +4859,9 @@
           <a:ln/>
         </p:spPr>
         <p:txBody>
-          <a:bodyPr wrap="square" rtlCol="0" anchor="t"/>
+          <a:bodyPr wrap="square" rtlCol="0" anchor="t">
+            <a:normAutofit/>
+          </a:bodyPr>
           <a:lstStyle/>
           <a:p>
             <a:pPr indent="0" marL="0">
@@ -4740,7 +4900,9 @@
           <a:ln/>
         </p:spPr>
         <p:txBody>
-          <a:bodyPr wrap="square" rtlCol="0" anchor="ctr"/>
+          <a:bodyPr wrap="square" rtlCol="0" anchor="ctr">
+            <a:normAutofit/>
+          </a:bodyPr>
           <a:lstStyle/>
           <a:p>
             <a:pPr indent="0" marL="0">
@@ -4779,7 +4941,9 @@
           <a:ln/>
         </p:spPr>
         <p:txBody>
-          <a:bodyPr wrap="square" rtlCol="0" anchor="t"/>
+          <a:bodyPr wrap="square" rtlCol="0" anchor="t">
+            <a:normAutofit/>
+          </a:bodyPr>
           <a:lstStyle/>
           <a:p>
             <a:pPr indent="0" marL="0">
@@ -4827,7 +4991,9 @@
           </a:ln>
         </p:spPr>
         <p:txBody>
-          <a:bodyPr/>
+          <a:bodyPr wrap="square">
+            <a:normAutofit/>
+          </a:bodyPr>
           <a:p/>
         </p:txBody>
       </p:sp>
@@ -4849,7 +5015,9 @@
           <a:ln/>
         </p:spPr>
         <p:txBody>
-          <a:bodyPr wrap="square" rtlCol="0" anchor="ctr"/>
+          <a:bodyPr wrap="square" rtlCol="0" anchor="ctr">
+            <a:normAutofit/>
+          </a:bodyPr>
           <a:lstStyle/>
           <a:p>
             <a:pPr indent="0" marL="0">
@@ -4888,7 +5056,9 @@
           <a:ln/>
         </p:spPr>
         <p:txBody>
-          <a:bodyPr wrap="square" rtlCol="0" anchor="t"/>
+          <a:bodyPr wrap="square" rtlCol="0" anchor="t">
+            <a:normAutofit/>
+          </a:bodyPr>
           <a:lstStyle/>
           <a:p>
             <a:pPr indent="0" marL="0">
@@ -4927,7 +5097,9 @@
           <a:ln/>
         </p:spPr>
         <p:txBody>
-          <a:bodyPr wrap="square" rtlCol="0" anchor="t"/>
+          <a:bodyPr wrap="square" rtlCol="0" anchor="t">
+            <a:normAutofit/>
+          </a:bodyPr>
           <a:lstStyle/>
           <a:p>
             <a:pPr indent="0" marL="0">
@@ -4966,7 +5138,9 @@
           <a:ln/>
         </p:spPr>
         <p:txBody>
-          <a:bodyPr wrap="square" rtlCol="0" anchor="t"/>
+          <a:bodyPr wrap="square" rtlCol="0" anchor="t">
+            <a:normAutofit/>
+          </a:bodyPr>
           <a:lstStyle/>
           <a:p>
             <a:pPr indent="0" marL="0">
@@ -5005,7 +5179,9 @@
           <a:ln/>
         </p:spPr>
         <p:txBody>
-          <a:bodyPr wrap="square" rtlCol="0" anchor="ctr"/>
+          <a:bodyPr wrap="square" rtlCol="0" anchor="ctr">
+            <a:normAutofit/>
+          </a:bodyPr>
           <a:lstStyle/>
           <a:p>
             <a:pPr algn="r" indent="0" marL="0">
@@ -5076,7 +5252,9 @@
           </a:ln>
         </p:spPr>
         <p:txBody>
-          <a:bodyPr/>
+          <a:bodyPr wrap="square">
+            <a:normAutofit/>
+          </a:bodyPr>
           <a:p/>
         </p:txBody>
       </p:sp>
@@ -5105,7 +5283,9 @@
           </a:ln>
         </p:spPr>
         <p:txBody>
-          <a:bodyPr/>
+          <a:bodyPr wrap="square">
+            <a:normAutofit/>
+          </a:bodyPr>
           <a:p/>
         </p:txBody>
       </p:sp>
@@ -5136,7 +5316,9 @@
           </a:ln>
         </p:spPr>
         <p:txBody>
-          <a:bodyPr/>
+          <a:bodyPr wrap="square">
+            <a:normAutofit/>
+          </a:bodyPr>
           <a:p/>
         </p:txBody>
       </p:sp>
@@ -5158,7 +5340,9 @@
           <a:ln/>
         </p:spPr>
         <p:txBody>
-          <a:bodyPr wrap="square" rtlCol="0" anchor="ctr"/>
+          <a:bodyPr wrap="square" rtlCol="0" anchor="ctr">
+            <a:normAutofit/>
+          </a:bodyPr>
           <a:lstStyle/>
           <a:p>
             <a:pPr algn="ctr" indent="0" marL="0">
@@ -5197,7 +5381,9 @@
           <a:ln/>
         </p:spPr>
         <p:txBody>
-          <a:bodyPr wrap="square" rtlCol="0" anchor="ctr"/>
+          <a:bodyPr wrap="square" rtlCol="0" anchor="ctr">
+            <a:normAutofit/>
+          </a:bodyPr>
           <a:lstStyle/>
           <a:p>
             <a:pPr indent="0" marL="0">
@@ -5236,7 +5422,9 @@
           <a:ln/>
         </p:spPr>
         <p:txBody>
-          <a:bodyPr wrap="square" rtlCol="0" anchor="ctr"/>
+          <a:bodyPr wrap="square" rtlCol="0" anchor="ctr">
+            <a:normAutofit/>
+          </a:bodyPr>
           <a:lstStyle/>
           <a:p>
             <a:pPr indent="0" marL="0">
@@ -5284,7 +5472,9 @@
           </a:ln>
         </p:spPr>
         <p:txBody>
-          <a:bodyPr/>
+          <a:bodyPr wrap="square">
+            <a:normAutofit/>
+          </a:bodyPr>
           <a:p/>
         </p:txBody>
       </p:sp>
@@ -5306,7 +5496,9 @@
           <a:ln/>
         </p:spPr>
         <p:txBody>
-          <a:bodyPr wrap="square" rtlCol="0" anchor="ctr"/>
+          <a:bodyPr wrap="square" rtlCol="0" anchor="ctr">
+            <a:normAutofit/>
+          </a:bodyPr>
           <a:lstStyle/>
           <a:p>
             <a:pPr indent="0" marL="0">
@@ -5345,7 +5537,9 @@
           <a:ln/>
         </p:spPr>
         <p:txBody>
-          <a:bodyPr wrap="square" rtlCol="0" anchor="ctr"/>
+          <a:bodyPr wrap="square" rtlCol="0" anchor="ctr">
+            <a:normAutofit/>
+          </a:bodyPr>
           <a:lstStyle/>
           <a:p>
             <a:pPr indent="0" marL="0">
@@ -5384,7 +5578,9 @@
           <a:ln/>
         </p:spPr>
         <p:txBody>
-          <a:bodyPr wrap="square" rtlCol="0" anchor="t"/>
+          <a:bodyPr wrap="square" rtlCol="0" anchor="t">
+            <a:normAutofit/>
+          </a:bodyPr>
           <a:lstStyle/>
           <a:p>
             <a:pPr indent="0" marL="0">
@@ -5423,7 +5619,9 @@
           <a:ln/>
         </p:spPr>
         <p:txBody>
-          <a:bodyPr wrap="square" rtlCol="0" anchor="ctr"/>
+          <a:bodyPr wrap="square" rtlCol="0" anchor="ctr">
+            <a:normAutofit/>
+          </a:bodyPr>
           <a:lstStyle/>
           <a:p>
             <a:pPr indent="0" marL="0">
@@ -5462,7 +5660,9 @@
           <a:ln/>
         </p:spPr>
         <p:txBody>
-          <a:bodyPr wrap="square" rtlCol="0" anchor="t"/>
+          <a:bodyPr wrap="square" rtlCol="0" anchor="t">
+            <a:normAutofit/>
+          </a:bodyPr>
           <a:lstStyle/>
           <a:p>
             <a:pPr indent="0" marL="0">
@@ -5501,7 +5701,9 @@
           <a:ln/>
         </p:spPr>
         <p:txBody>
-          <a:bodyPr wrap="square" rtlCol="0" anchor="ctr"/>
+          <a:bodyPr wrap="square" rtlCol="0" anchor="ctr">
+            <a:normAutofit/>
+          </a:bodyPr>
           <a:lstStyle/>
           <a:p>
             <a:pPr indent="0" marL="0">
@@ -5540,7 +5742,9 @@
           <a:ln/>
         </p:spPr>
         <p:txBody>
-          <a:bodyPr wrap="square" rtlCol="0" anchor="t"/>
+          <a:bodyPr wrap="square" rtlCol="0" anchor="t">
+            <a:normAutofit/>
+          </a:bodyPr>
           <a:lstStyle/>
           <a:p>
             <a:pPr indent="0" marL="0">
@@ -5588,7 +5792,9 @@
           </a:ln>
         </p:spPr>
         <p:txBody>
-          <a:bodyPr/>
+          <a:bodyPr wrap="square">
+            <a:normAutofit/>
+          </a:bodyPr>
           <a:p/>
         </p:txBody>
       </p:sp>
@@ -5610,7 +5816,9 @@
           <a:ln/>
         </p:spPr>
         <p:txBody>
-          <a:bodyPr wrap="square" rtlCol="0" anchor="ctr"/>
+          <a:bodyPr wrap="square" rtlCol="0" anchor="ctr">
+            <a:normAutofit/>
+          </a:bodyPr>
           <a:lstStyle/>
           <a:p>
             <a:pPr indent="0" marL="0">
@@ -5649,7 +5857,9 @@
           <a:ln/>
         </p:spPr>
         <p:txBody>
-          <a:bodyPr wrap="square" rtlCol="0" anchor="t"/>
+          <a:bodyPr wrap="square" rtlCol="0" anchor="t">
+            <a:normAutofit/>
+          </a:bodyPr>
           <a:lstStyle/>
           <a:p>
             <a:pPr indent="0" marL="0">
@@ -5688,7 +5898,9 @@
           <a:ln/>
         </p:spPr>
         <p:txBody>
-          <a:bodyPr wrap="square" rtlCol="0" anchor="t"/>
+          <a:bodyPr wrap="square" rtlCol="0" anchor="t">
+            <a:normAutofit/>
+          </a:bodyPr>
           <a:lstStyle/>
           <a:p>
             <a:pPr indent="0" marL="0">
@@ -5727,7 +5939,9 @@
           <a:ln/>
         </p:spPr>
         <p:txBody>
-          <a:bodyPr wrap="square" rtlCol="0" anchor="t"/>
+          <a:bodyPr wrap="square" rtlCol="0" anchor="t">
+            <a:normAutofit/>
+          </a:bodyPr>
           <a:lstStyle/>
           <a:p>
             <a:pPr indent="0" marL="0">
@@ -5766,7 +5980,9 @@
           <a:ln/>
         </p:spPr>
         <p:txBody>
-          <a:bodyPr wrap="square" rtlCol="0" anchor="ctr"/>
+          <a:bodyPr wrap="square" rtlCol="0" anchor="ctr">
+            <a:normAutofit/>
+          </a:bodyPr>
           <a:lstStyle/>
           <a:p>
             <a:pPr algn="r" indent="0" marL="0">
@@ -5837,7 +6053,9 @@
           </a:ln>
         </p:spPr>
         <p:txBody>
-          <a:bodyPr/>
+          <a:bodyPr wrap="square">
+            <a:normAutofit/>
+          </a:bodyPr>
           <a:p/>
         </p:txBody>
       </p:sp>
@@ -5866,7 +6084,9 @@
           </a:ln>
         </p:spPr>
         <p:txBody>
-          <a:bodyPr/>
+          <a:bodyPr wrap="square">
+            <a:normAutofit/>
+          </a:bodyPr>
           <a:p/>
         </p:txBody>
       </p:sp>
@@ -5897,7 +6117,9 @@
           </a:ln>
         </p:spPr>
         <p:txBody>
-          <a:bodyPr/>
+          <a:bodyPr wrap="square">
+            <a:normAutofit/>
+          </a:bodyPr>
           <a:p/>
         </p:txBody>
       </p:sp>
@@ -5919,7 +6141,9 @@
           <a:ln/>
         </p:spPr>
         <p:txBody>
-          <a:bodyPr wrap="square" rtlCol="0" anchor="ctr"/>
+          <a:bodyPr wrap="square" rtlCol="0" anchor="ctr">
+            <a:normAutofit/>
+          </a:bodyPr>
           <a:lstStyle/>
           <a:p>
             <a:pPr algn="ctr" indent="0" marL="0">
@@ -5958,7 +6182,9 @@
           <a:ln/>
         </p:spPr>
         <p:txBody>
-          <a:bodyPr wrap="square" rtlCol="0" anchor="ctr"/>
+          <a:bodyPr wrap="square" rtlCol="0" anchor="ctr">
+            <a:normAutofit/>
+          </a:bodyPr>
           <a:lstStyle/>
           <a:p>
             <a:pPr indent="0" marL="0">
@@ -5997,7 +6223,9 @@
           <a:ln/>
         </p:spPr>
         <p:txBody>
-          <a:bodyPr wrap="square" rtlCol="0" anchor="ctr"/>
+          <a:bodyPr wrap="square" rtlCol="0" anchor="ctr">
+            <a:normAutofit/>
+          </a:bodyPr>
           <a:lstStyle/>
           <a:p>
             <a:pPr indent="0" marL="0">
@@ -6045,7 +6273,9 @@
           </a:ln>
         </p:spPr>
         <p:txBody>
-          <a:bodyPr/>
+          <a:bodyPr wrap="square">
+            <a:normAutofit/>
+          </a:bodyPr>
           <a:p/>
         </p:txBody>
       </p:sp>
@@ -6067,7 +6297,9 @@
           <a:ln/>
         </p:spPr>
         <p:txBody>
-          <a:bodyPr wrap="square" rtlCol="0" anchor="ctr"/>
+          <a:bodyPr wrap="square" rtlCol="0" anchor="ctr">
+            <a:normAutofit/>
+          </a:bodyPr>
           <a:lstStyle/>
           <a:p>
             <a:pPr indent="0" marL="0">
@@ -6106,7 +6338,9 @@
           <a:ln/>
         </p:spPr>
         <p:txBody>
-          <a:bodyPr wrap="square" rtlCol="0" anchor="ctr"/>
+          <a:bodyPr wrap="square" rtlCol="0" anchor="ctr">
+            <a:normAutofit/>
+          </a:bodyPr>
           <a:lstStyle/>
           <a:p>
             <a:pPr indent="0" marL="0">
@@ -6145,7 +6379,9 @@
           <a:ln/>
         </p:spPr>
         <p:txBody>
-          <a:bodyPr wrap="square" rtlCol="0" anchor="t"/>
+          <a:bodyPr wrap="square" rtlCol="0" anchor="t">
+            <a:normAutofit/>
+          </a:bodyPr>
           <a:lstStyle/>
           <a:p>
             <a:pPr indent="0" marL="0">
@@ -6184,7 +6420,9 @@
           <a:ln/>
         </p:spPr>
         <p:txBody>
-          <a:bodyPr wrap="square" rtlCol="0" anchor="ctr"/>
+          <a:bodyPr wrap="square" rtlCol="0" anchor="ctr">
+            <a:normAutofit/>
+          </a:bodyPr>
           <a:lstStyle/>
           <a:p>
             <a:pPr indent="0" marL="0">
@@ -6223,7 +6461,9 @@
           <a:ln/>
         </p:spPr>
         <p:txBody>
-          <a:bodyPr wrap="square" rtlCol="0" anchor="t"/>
+          <a:bodyPr wrap="square" rtlCol="0" anchor="t">
+            <a:normAutofit/>
+          </a:bodyPr>
           <a:lstStyle/>
           <a:p>
             <a:pPr indent="0" marL="0">
@@ -6262,7 +6502,9 @@
           <a:ln/>
         </p:spPr>
         <p:txBody>
-          <a:bodyPr wrap="square" rtlCol="0" anchor="ctr"/>
+          <a:bodyPr wrap="square" rtlCol="0" anchor="ctr">
+            <a:normAutofit/>
+          </a:bodyPr>
           <a:lstStyle/>
           <a:p>
             <a:pPr indent="0" marL="0">
@@ -6301,7 +6543,9 @@
           <a:ln/>
         </p:spPr>
         <p:txBody>
-          <a:bodyPr wrap="square" rtlCol="0" anchor="t"/>
+          <a:bodyPr wrap="square" rtlCol="0" anchor="t">
+            <a:normAutofit/>
+          </a:bodyPr>
           <a:lstStyle/>
           <a:p>
             <a:pPr indent="0" marL="0">
@@ -6349,7 +6593,9 @@
           </a:ln>
         </p:spPr>
         <p:txBody>
-          <a:bodyPr/>
+          <a:bodyPr wrap="square">
+            <a:normAutofit/>
+          </a:bodyPr>
           <a:p/>
         </p:txBody>
       </p:sp>
@@ -6371,7 +6617,9 @@
           <a:ln/>
         </p:spPr>
         <p:txBody>
-          <a:bodyPr wrap="square" rtlCol="0" anchor="ctr"/>
+          <a:bodyPr wrap="square" rtlCol="0" anchor="ctr">
+            <a:normAutofit/>
+          </a:bodyPr>
           <a:lstStyle/>
           <a:p>
             <a:pPr indent="0" marL="0">
@@ -6410,7 +6658,9 @@
           <a:ln/>
         </p:spPr>
         <p:txBody>
-          <a:bodyPr wrap="square" rtlCol="0" anchor="t"/>
+          <a:bodyPr wrap="square" rtlCol="0" anchor="t">
+            <a:normAutofit/>
+          </a:bodyPr>
           <a:lstStyle/>
           <a:p>
             <a:pPr indent="0" marL="0">
@@ -6449,7 +6699,9 @@
           <a:ln/>
         </p:spPr>
         <p:txBody>
-          <a:bodyPr wrap="square" rtlCol="0" anchor="t"/>
+          <a:bodyPr wrap="square" rtlCol="0" anchor="t">
+            <a:normAutofit/>
+          </a:bodyPr>
           <a:lstStyle/>
           <a:p>
             <a:pPr indent="0" marL="0">
@@ -6488,7 +6740,9 @@
           <a:ln/>
         </p:spPr>
         <p:txBody>
-          <a:bodyPr wrap="square" rtlCol="0" anchor="t"/>
+          <a:bodyPr wrap="square" rtlCol="0" anchor="t">
+            <a:normAutofit/>
+          </a:bodyPr>
           <a:lstStyle/>
           <a:p>
             <a:pPr indent="0" marL="0">
@@ -6527,7 +6781,9 @@
           <a:ln/>
         </p:spPr>
         <p:txBody>
-          <a:bodyPr wrap="square" rtlCol="0" anchor="ctr"/>
+          <a:bodyPr wrap="square" rtlCol="0" anchor="ctr">
+            <a:normAutofit/>
+          </a:bodyPr>
           <a:lstStyle/>
           <a:p>
             <a:pPr algn="r" indent="0" marL="0">
@@ -6598,7 +6854,9 @@
           </a:ln>
         </p:spPr>
         <p:txBody>
-          <a:bodyPr/>
+          <a:bodyPr wrap="square">
+            <a:normAutofit/>
+          </a:bodyPr>
           <a:p/>
         </p:txBody>
       </p:sp>
@@ -6627,7 +6885,9 @@
           </a:ln>
         </p:spPr>
         <p:txBody>
-          <a:bodyPr/>
+          <a:bodyPr wrap="square">
+            <a:normAutofit/>
+          </a:bodyPr>
           <a:p/>
         </p:txBody>
       </p:sp>
@@ -6649,7 +6909,9 @@
           <a:ln/>
         </p:spPr>
         <p:txBody>
-          <a:bodyPr wrap="square" rtlCol="0" anchor="ctr"/>
+          <a:bodyPr wrap="square" rtlCol="0" anchor="ctr">
+            <a:normAutofit/>
+          </a:bodyPr>
           <a:lstStyle/>
           <a:p>
             <a:pPr indent="0" marL="0">
@@ -6688,7 +6950,9 @@
           <a:ln/>
         </p:spPr>
         <p:txBody>
-          <a:bodyPr wrap="square" rtlCol="0" anchor="ctr"/>
+          <a:bodyPr wrap="square" rtlCol="0" anchor="ctr">
+            <a:normAutofit/>
+          </a:bodyPr>
           <a:lstStyle/>
           <a:p>
             <a:pPr algn="ctr" indent="0" marL="0">
@@ -6727,7 +6991,9 @@
           <a:ln/>
         </p:spPr>
         <p:txBody>
-          <a:bodyPr wrap="square" rtlCol="0" anchor="ctr"/>
+          <a:bodyPr wrap="square" rtlCol="0" anchor="ctr">
+            <a:normAutofit/>
+          </a:bodyPr>
           <a:lstStyle/>
           <a:p>
             <a:pPr algn="ctr" indent="0" marL="0">
@@ -6775,7 +7041,9 @@
           </a:ln>
         </p:spPr>
         <p:txBody>
-          <a:bodyPr/>
+          <a:bodyPr wrap="square">
+            <a:normAutofit/>
+          </a:bodyPr>
           <a:p/>
         </p:txBody>
       </p:sp>
@@ -6804,7 +7072,9 @@
           </a:ln>
         </p:spPr>
         <p:txBody>
-          <a:bodyPr/>
+          <a:bodyPr wrap="square">
+            <a:normAutofit/>
+          </a:bodyPr>
           <a:p/>
         </p:txBody>
       </p:sp>
@@ -6826,7 +7096,9 @@
           <a:ln/>
         </p:spPr>
         <p:txBody>
-          <a:bodyPr wrap="square" rtlCol="0" anchor="ctr"/>
+          <a:bodyPr wrap="square" rtlCol="0" anchor="ctr">
+            <a:normAutofit/>
+          </a:bodyPr>
           <a:lstStyle/>
           <a:p>
             <a:pPr algn="ctr" indent="0" marL="0">
@@ -6865,7 +7137,9 @@
           <a:ln/>
         </p:spPr>
         <p:txBody>
-          <a:bodyPr wrap="square" rtlCol="0" anchor="ctr"/>
+          <a:bodyPr wrap="square" rtlCol="0" anchor="ctr">
+            <a:normAutofit/>
+          </a:bodyPr>
           <a:lstStyle/>
           <a:p>
             <a:pPr indent="0" marL="0">
@@ -6904,7 +7178,9 @@
           <a:ln/>
         </p:spPr>
         <p:txBody>
-          <a:bodyPr wrap="square" rtlCol="0" anchor="ctr"/>
+          <a:bodyPr wrap="square" rtlCol="0" anchor="ctr">
+            <a:normAutofit/>
+          </a:bodyPr>
           <a:lstStyle/>
           <a:p>
             <a:pPr indent="0" marL="0">
@@ -6952,7 +7228,9 @@
           </a:ln>
         </p:spPr>
         <p:txBody>
-          <a:bodyPr/>
+          <a:bodyPr wrap="square">
+            <a:normAutofit/>
+          </a:bodyPr>
           <a:p/>
         </p:txBody>
       </p:sp>
@@ -6981,7 +7259,9 @@
           </a:ln>
         </p:spPr>
         <p:txBody>
-          <a:bodyPr/>
+          <a:bodyPr wrap="square">
+            <a:normAutofit/>
+          </a:bodyPr>
           <a:p/>
         </p:txBody>
       </p:sp>
@@ -7003,7 +7283,9 @@
           <a:ln/>
         </p:spPr>
         <p:txBody>
-          <a:bodyPr wrap="square" rtlCol="0" anchor="ctr"/>
+          <a:bodyPr wrap="square" rtlCol="0" anchor="ctr">
+            <a:normAutofit/>
+          </a:bodyPr>
           <a:lstStyle/>
           <a:p>
             <a:pPr algn="ctr" indent="0" marL="0">
@@ -7042,7 +7324,9 @@
           <a:ln/>
         </p:spPr>
         <p:txBody>
-          <a:bodyPr wrap="square" rtlCol="0" anchor="ctr"/>
+          <a:bodyPr wrap="square" rtlCol="0" anchor="ctr">
+            <a:normAutofit/>
+          </a:bodyPr>
           <a:lstStyle/>
           <a:p>
             <a:pPr indent="0" marL="0">
@@ -7081,7 +7365,9 @@
           <a:ln/>
         </p:spPr>
         <p:txBody>
-          <a:bodyPr wrap="square" rtlCol="0" anchor="ctr"/>
+          <a:bodyPr wrap="square" rtlCol="0" anchor="ctr">
+            <a:normAutofit/>
+          </a:bodyPr>
           <a:lstStyle/>
           <a:p>
             <a:pPr indent="0" marL="0">
@@ -7129,7 +7415,9 @@
           </a:ln>
         </p:spPr>
         <p:txBody>
-          <a:bodyPr/>
+          <a:bodyPr wrap="square">
+            <a:normAutofit/>
+          </a:bodyPr>
           <a:p/>
         </p:txBody>
       </p:sp>
@@ -7158,7 +7446,9 @@
           </a:ln>
         </p:spPr>
         <p:txBody>
-          <a:bodyPr/>
+          <a:bodyPr wrap="square">
+            <a:normAutofit/>
+          </a:bodyPr>
           <a:p/>
         </p:txBody>
       </p:sp>
@@ -7180,7 +7470,9 @@
           <a:ln/>
         </p:spPr>
         <p:txBody>
-          <a:bodyPr wrap="square" rtlCol="0" anchor="ctr"/>
+          <a:bodyPr wrap="square" rtlCol="0" anchor="ctr">
+            <a:normAutofit/>
+          </a:bodyPr>
           <a:lstStyle/>
           <a:p>
             <a:pPr algn="ctr" indent="0" marL="0">
@@ -7219,7 +7511,9 @@
           <a:ln/>
         </p:spPr>
         <p:txBody>
-          <a:bodyPr wrap="square" rtlCol="0" anchor="ctr"/>
+          <a:bodyPr wrap="square" rtlCol="0" anchor="ctr">
+            <a:normAutofit/>
+          </a:bodyPr>
           <a:lstStyle/>
           <a:p>
             <a:pPr indent="0" marL="0">
@@ -7258,7 +7552,9 @@
           <a:ln/>
         </p:spPr>
         <p:txBody>
-          <a:bodyPr wrap="square" rtlCol="0" anchor="ctr"/>
+          <a:bodyPr wrap="square" rtlCol="0" anchor="ctr">
+            <a:normAutofit/>
+          </a:bodyPr>
           <a:lstStyle/>
           <a:p>
             <a:pPr indent="0" marL="0">
@@ -7297,7 +7593,9 @@
           <a:ln/>
         </p:spPr>
         <p:txBody>
-          <a:bodyPr wrap="square" rtlCol="0" anchor="ctr"/>
+          <a:bodyPr wrap="square" rtlCol="0" anchor="ctr">
+            <a:normAutofit/>
+          </a:bodyPr>
           <a:lstStyle/>
           <a:p>
             <a:pPr algn="r" indent="0" marL="0">

--- a/pptx_sessions_8_22/第9回_応用編_講師用.pptx
+++ b/pptx_sessions_8_22/第9回_応用編_講師用.pptx
@@ -1957,7 +1957,7 @@
               <a:buNone/>
             </a:pPr>
             <a:r>
-              <a:rPr lang="en-US" sz="2000" dirty="0">
+              <a:rPr lang="en-US" sz="1400" dirty="0">
                 <a:solidFill>
                   <a:srgbClr val="555555"/>
                 </a:solidFill>
@@ -2448,7 +2448,7 @@
         <p:spPr>
           <a:xfrm>
             <a:off x="11338560" y="6565392"/>
-            <a:ext cx="640080" cy="274320"/>
+            <a:ext cx="640080" cy="329184"/>
           </a:xfrm>
           <a:prstGeom prst="rect">
             <a:avLst/>
@@ -2466,7 +2466,7 @@
               <a:buNone/>
             </a:pPr>
             <a:r>
-              <a:rPr lang="en-US" sz="1400" dirty="0">
+              <a:rPr lang="en-US" sz="1100" dirty="0">
                 <a:solidFill>
                   <a:srgbClr val="888888"/>
                 </a:solidFill>
@@ -3583,7 +3583,7 @@
         <p:spPr>
           <a:xfrm>
             <a:off x="11338560" y="6565392"/>
-            <a:ext cx="640080" cy="274320"/>
+            <a:ext cx="640080" cy="329184"/>
           </a:xfrm>
           <a:prstGeom prst="rect">
             <a:avLst/>
@@ -3601,7 +3601,7 @@
               <a:buNone/>
             </a:pPr>
             <a:r>
-              <a:rPr lang="en-US" sz="1400" dirty="0">
+              <a:rPr lang="en-US" sz="1100" dirty="0">
                 <a:solidFill>
                   <a:srgbClr val="888888"/>
                 </a:solidFill>
@@ -3844,7 +3844,7 @@
               <a:buNone/>
             </a:pPr>
             <a:r>
-              <a:rPr lang="en-US" sz="2000" dirty="0">
+              <a:rPr lang="en-US" sz="1400" dirty="0">
                 <a:solidFill>
                   <a:srgbClr val="555555"/>
                 </a:solidFill>
@@ -3959,7 +3959,7 @@
               <a:buNone/>
             </a:pPr>
             <a:r>
-              <a:rPr lang="en-US" sz="2000" dirty="0">
+              <a:rPr lang="en-US" sz="1600" dirty="0">
                 <a:solidFill>
                   <a:srgbClr val="222222"/>
                 </a:solidFill>
@@ -3976,7 +3976,7 @@
               <a:buNone/>
             </a:pPr>
             <a:r>
-              <a:rPr lang="en-US" sz="2000" dirty="0">
+              <a:rPr lang="en-US" sz="1600" dirty="0">
                 <a:solidFill>
                   <a:srgbClr val="222222"/>
                 </a:solidFill>
@@ -3993,7 +3993,7 @@
               <a:buNone/>
             </a:pPr>
             <a:r>
-              <a:rPr lang="en-US" sz="2000" dirty="0">
+              <a:rPr lang="en-US" sz="1600" dirty="0">
                 <a:solidFill>
                   <a:srgbClr val="222222"/>
                 </a:solidFill>
@@ -4010,7 +4010,7 @@
               <a:buNone/>
             </a:pPr>
             <a:r>
-              <a:rPr lang="en-US" sz="2000" dirty="0">
+              <a:rPr lang="en-US" sz="1600" dirty="0">
                 <a:solidFill>
                   <a:srgbClr val="222222"/>
                 </a:solidFill>
@@ -4027,7 +4027,7 @@
               <a:buNone/>
             </a:pPr>
             <a:r>
-              <a:rPr lang="en-US" sz="2000" dirty="0">
+              <a:rPr lang="en-US" sz="1600" dirty="0">
                 <a:solidFill>
                   <a:srgbClr val="222222"/>
                 </a:solidFill>
@@ -4044,7 +4044,7 @@
               <a:buNone/>
             </a:pPr>
             <a:r>
-              <a:rPr lang="en-US" sz="2000" dirty="0">
+              <a:rPr lang="en-US" sz="1600" dirty="0">
                 <a:solidFill>
                   <a:srgbClr val="222222"/>
                 </a:solidFill>
@@ -4061,7 +4061,7 @@
               <a:buNone/>
             </a:pPr>
             <a:r>
-              <a:rPr lang="en-US" sz="2000" dirty="0">
+              <a:rPr lang="en-US" sz="1600" dirty="0">
                 <a:solidFill>
                   <a:srgbClr val="222222"/>
                 </a:solidFill>
@@ -4078,7 +4078,7 @@
               <a:buNone/>
             </a:pPr>
             <a:r>
-              <a:rPr lang="en-US" sz="2000" dirty="0">
+              <a:rPr lang="en-US" sz="1600" dirty="0">
                 <a:solidFill>
                   <a:srgbClr val="222222"/>
                 </a:solidFill>
@@ -4095,7 +4095,7 @@
               <a:buNone/>
             </a:pPr>
             <a:r>
-              <a:rPr lang="en-US" sz="2000" dirty="0">
+              <a:rPr lang="en-US" sz="1600" dirty="0">
                 <a:solidFill>
                   <a:srgbClr val="222222"/>
                 </a:solidFill>
@@ -4369,7 +4369,7 @@
         <p:spPr>
           <a:xfrm>
             <a:off x="11338560" y="6565392"/>
-            <a:ext cx="640080" cy="274320"/>
+            <a:ext cx="640080" cy="329184"/>
           </a:xfrm>
           <a:prstGeom prst="rect">
             <a:avLst/>
@@ -4387,7 +4387,7 @@
               <a:buNone/>
             </a:pPr>
             <a:r>
-              <a:rPr lang="en-US" sz="1400" dirty="0">
+              <a:rPr lang="en-US" sz="1100" dirty="0">
                 <a:solidFill>
                   <a:srgbClr val="888888"/>
                 </a:solidFill>
@@ -4630,7 +4630,7 @@
               <a:buNone/>
             </a:pPr>
             <a:r>
-              <a:rPr lang="en-US" sz="2000" dirty="0">
+              <a:rPr lang="en-US" sz="1400" dirty="0">
                 <a:solidFill>
                   <a:srgbClr val="222222"/>
                 </a:solidFill>
@@ -4786,7 +4786,7 @@
               <a:buNone/>
             </a:pPr>
             <a:r>
-              <a:rPr lang="en-US" sz="2000" dirty="0">
+              <a:rPr lang="en-US" sz="1400" dirty="0">
                 <a:solidFill>
                   <a:srgbClr val="222222"/>
                 </a:solidFill>
@@ -4868,7 +4868,7 @@
               <a:buNone/>
             </a:pPr>
             <a:r>
-              <a:rPr lang="en-US" sz="2000" dirty="0">
+              <a:rPr lang="en-US" sz="1400" dirty="0">
                 <a:solidFill>
                   <a:srgbClr val="222222"/>
                 </a:solidFill>
@@ -4950,7 +4950,7 @@
               <a:buNone/>
             </a:pPr>
             <a:r>
-              <a:rPr lang="en-US" sz="2000" dirty="0">
+              <a:rPr lang="en-US" sz="1400" dirty="0">
                 <a:solidFill>
                   <a:srgbClr val="222222"/>
                 </a:solidFill>
@@ -5046,8 +5046,8 @@
         </p:nvSpPr>
         <p:spPr>
           <a:xfrm>
-            <a:off x="731520" y="5852160"/>
-            <a:ext cx="10881360" cy="213360"/>
+            <a:off x="731520" y="5669280"/>
+            <a:ext cx="10881360" cy="310896"/>
           </a:xfrm>
           <a:prstGeom prst="rect">
             <a:avLst/>
@@ -5065,7 +5065,7 @@
               <a:buNone/>
             </a:pPr>
             <a:r>
-              <a:rPr lang="en-US" sz="2000" dirty="0">
+              <a:rPr lang="en-US" sz="1100" dirty="0">
                 <a:solidFill>
                   <a:srgbClr val="222222"/>
                 </a:solidFill>
@@ -5087,8 +5087,8 @@
         </p:nvSpPr>
         <p:spPr>
           <a:xfrm>
-            <a:off x="731520" y="6065520"/>
-            <a:ext cx="10881360" cy="213360"/>
+            <a:off x="731520" y="6007608"/>
+            <a:ext cx="10881360" cy="310896"/>
           </a:xfrm>
           <a:prstGeom prst="rect">
             <a:avLst/>
@@ -5106,7 +5106,7 @@
               <a:buNone/>
             </a:pPr>
             <a:r>
-              <a:rPr lang="en-US" sz="2000" dirty="0">
+              <a:rPr lang="en-US" sz="1100" dirty="0">
                 <a:solidFill>
                   <a:srgbClr val="222222"/>
                 </a:solidFill>
@@ -5128,8 +5128,8 @@
         </p:nvSpPr>
         <p:spPr>
           <a:xfrm>
-            <a:off x="731520" y="6278880"/>
-            <a:ext cx="10881360" cy="213360"/>
+            <a:off x="731520" y="6345936"/>
+            <a:ext cx="10881360" cy="310896"/>
           </a:xfrm>
           <a:prstGeom prst="rect">
             <a:avLst/>
@@ -5147,7 +5147,7 @@
               <a:buNone/>
             </a:pPr>
             <a:r>
-              <a:rPr lang="en-US" sz="2000" dirty="0">
+              <a:rPr lang="en-US" sz="1100" dirty="0">
                 <a:solidFill>
                   <a:srgbClr val="222222"/>
                 </a:solidFill>
@@ -5170,7 +5170,7 @@
         <p:spPr>
           <a:xfrm>
             <a:off x="11338560" y="6565392"/>
-            <a:ext cx="640080" cy="274320"/>
+            <a:ext cx="640080" cy="329184"/>
           </a:xfrm>
           <a:prstGeom prst="rect">
             <a:avLst/>
@@ -5188,7 +5188,7 @@
               <a:buNone/>
             </a:pPr>
             <a:r>
-              <a:rPr lang="en-US" sz="1400" dirty="0">
+              <a:rPr lang="en-US" sz="1100" dirty="0">
                 <a:solidFill>
                   <a:srgbClr val="888888"/>
                 </a:solidFill>
@@ -5431,7 +5431,7 @@
               <a:buNone/>
             </a:pPr>
             <a:r>
-              <a:rPr lang="en-US" sz="2000" dirty="0">
+              <a:rPr lang="en-US" sz="1400" dirty="0">
                 <a:solidFill>
                   <a:srgbClr val="222222"/>
                 </a:solidFill>
@@ -5751,7 +5751,7 @@
               <a:buNone/>
             </a:pPr>
             <a:r>
-              <a:rPr lang="en-US" sz="2000" dirty="0">
+              <a:rPr lang="en-US" sz="1400" dirty="0">
                 <a:solidFill>
                   <a:srgbClr val="222222"/>
                 </a:solidFill>
@@ -5847,8 +5847,8 @@
         </p:nvSpPr>
         <p:spPr>
           <a:xfrm>
-            <a:off x="731520" y="5852160"/>
-            <a:ext cx="10881360" cy="213360"/>
+            <a:off x="731520" y="5669280"/>
+            <a:ext cx="10881360" cy="310896"/>
           </a:xfrm>
           <a:prstGeom prst="rect">
             <a:avLst/>
@@ -5866,7 +5866,7 @@
               <a:buNone/>
             </a:pPr>
             <a:r>
-              <a:rPr lang="en-US" sz="2000" dirty="0">
+              <a:rPr lang="en-US" sz="1100" dirty="0">
                 <a:solidFill>
                   <a:srgbClr val="222222"/>
                 </a:solidFill>
@@ -5888,8 +5888,8 @@
         </p:nvSpPr>
         <p:spPr>
           <a:xfrm>
-            <a:off x="731520" y="6065520"/>
-            <a:ext cx="10881360" cy="213360"/>
+            <a:off x="731520" y="6007608"/>
+            <a:ext cx="10881360" cy="310896"/>
           </a:xfrm>
           <a:prstGeom prst="rect">
             <a:avLst/>
@@ -5907,7 +5907,7 @@
               <a:buNone/>
             </a:pPr>
             <a:r>
-              <a:rPr lang="en-US" sz="2000" dirty="0">
+              <a:rPr lang="en-US" sz="1100" dirty="0">
                 <a:solidFill>
                   <a:srgbClr val="222222"/>
                 </a:solidFill>
@@ -5929,8 +5929,8 @@
         </p:nvSpPr>
         <p:spPr>
           <a:xfrm>
-            <a:off x="731520" y="6278880"/>
-            <a:ext cx="10881360" cy="213360"/>
+            <a:off x="731520" y="6345936"/>
+            <a:ext cx="10881360" cy="310896"/>
           </a:xfrm>
           <a:prstGeom prst="rect">
             <a:avLst/>
@@ -5948,7 +5948,7 @@
               <a:buNone/>
             </a:pPr>
             <a:r>
-              <a:rPr lang="en-US" sz="2000" dirty="0">
+              <a:rPr lang="en-US" sz="1100" dirty="0">
                 <a:solidFill>
                   <a:srgbClr val="222222"/>
                 </a:solidFill>
@@ -5971,7 +5971,7 @@
         <p:spPr>
           <a:xfrm>
             <a:off x="11338560" y="6565392"/>
-            <a:ext cx="640080" cy="274320"/>
+            <a:ext cx="640080" cy="329184"/>
           </a:xfrm>
           <a:prstGeom prst="rect">
             <a:avLst/>
@@ -5989,7 +5989,7 @@
               <a:buNone/>
             </a:pPr>
             <a:r>
-              <a:rPr lang="en-US" sz="1400" dirty="0">
+              <a:rPr lang="en-US" sz="1100" dirty="0">
                 <a:solidFill>
                   <a:srgbClr val="888888"/>
                 </a:solidFill>
@@ -6552,7 +6552,7 @@
               <a:buNone/>
             </a:pPr>
             <a:r>
-              <a:rPr lang="en-US" sz="2000" dirty="0">
+              <a:rPr lang="en-US" sz="1400" dirty="0">
                 <a:solidFill>
                   <a:srgbClr val="222222"/>
                 </a:solidFill>
@@ -6648,8 +6648,8 @@
         </p:nvSpPr>
         <p:spPr>
           <a:xfrm>
-            <a:off x="731520" y="5852160"/>
-            <a:ext cx="10881360" cy="213360"/>
+            <a:off x="731520" y="5669280"/>
+            <a:ext cx="10881360" cy="310896"/>
           </a:xfrm>
           <a:prstGeom prst="rect">
             <a:avLst/>
@@ -6667,7 +6667,7 @@
               <a:buNone/>
             </a:pPr>
             <a:r>
-              <a:rPr lang="en-US" sz="2000" dirty="0">
+              <a:rPr lang="en-US" sz="1100" dirty="0">
                 <a:solidFill>
                   <a:srgbClr val="222222"/>
                 </a:solidFill>
@@ -6689,8 +6689,8 @@
         </p:nvSpPr>
         <p:spPr>
           <a:xfrm>
-            <a:off x="731520" y="6065520"/>
-            <a:ext cx="10881360" cy="213360"/>
+            <a:off x="731520" y="6007608"/>
+            <a:ext cx="10881360" cy="310896"/>
           </a:xfrm>
           <a:prstGeom prst="rect">
             <a:avLst/>
@@ -6708,7 +6708,7 @@
               <a:buNone/>
             </a:pPr>
             <a:r>
-              <a:rPr lang="en-US" sz="2000" dirty="0">
+              <a:rPr lang="en-US" sz="1100" dirty="0">
                 <a:solidFill>
                   <a:srgbClr val="222222"/>
                 </a:solidFill>
@@ -6730,8 +6730,8 @@
         </p:nvSpPr>
         <p:spPr>
           <a:xfrm>
-            <a:off x="731520" y="6278880"/>
-            <a:ext cx="10881360" cy="213360"/>
+            <a:off x="731520" y="6345936"/>
+            <a:ext cx="10881360" cy="310896"/>
           </a:xfrm>
           <a:prstGeom prst="rect">
             <a:avLst/>
@@ -6749,7 +6749,7 @@
               <a:buNone/>
             </a:pPr>
             <a:r>
-              <a:rPr lang="en-US" sz="2000" dirty="0">
+              <a:rPr lang="en-US" sz="1100" dirty="0">
                 <a:solidFill>
                   <a:srgbClr val="222222"/>
                 </a:solidFill>
@@ -6772,7 +6772,7 @@
         <p:spPr>
           <a:xfrm>
             <a:off x="11338560" y="6565392"/>
-            <a:ext cx="640080" cy="274320"/>
+            <a:ext cx="640080" cy="329184"/>
           </a:xfrm>
           <a:prstGeom prst="rect">
             <a:avLst/>
@@ -6790,7 +6790,7 @@
               <a:buNone/>
             </a:pPr>
             <a:r>
-              <a:rPr lang="en-US" sz="1400" dirty="0">
+              <a:rPr lang="en-US" sz="1100" dirty="0">
                 <a:solidFill>
                   <a:srgbClr val="888888"/>
                 </a:solidFill>
@@ -6959,7 +6959,7 @@
               <a:buNone/>
             </a:pPr>
             <a:r>
-              <a:rPr lang="en-US" sz="2000" dirty="0">
+              <a:rPr lang="en-US" sz="1400" dirty="0">
                 <a:solidFill>
                   <a:srgbClr val="222222"/>
                 </a:solidFill>
@@ -7584,7 +7584,7 @@
         <p:spPr>
           <a:xfrm>
             <a:off x="11338560" y="6565392"/>
-            <a:ext cx="640080" cy="274320"/>
+            <a:ext cx="640080" cy="329184"/>
           </a:xfrm>
           <a:prstGeom prst="rect">
             <a:avLst/>
@@ -7602,7 +7602,7 @@
               <a:buNone/>
             </a:pPr>
             <a:r>
-              <a:rPr lang="en-US" sz="1400" dirty="0">
+              <a:rPr lang="en-US" sz="1100" dirty="0">
                 <a:solidFill>
                   <a:srgbClr val="888888"/>
                 </a:solidFill>
